--- a/docs/slides/tiya-website-meeting-deck.pptx
+++ b/docs/slides/tiya-website-meeting-deck.pptx
@@ -9982,7 +9982,7 @@
                 <a:ea typeface="Noto Sans TC" pitchFamily="34" charset="-122"/>
                 <a:cs typeface="Noto Sans TC" pitchFamily="34" charset="-120"/>
               </a:rPr>
-              <a:t>tiya.org.tw 要不要租？預算 NT$800-1200/年，誰執行、誰持有？</a:t>
+              <a:t>tiya.org.tw 要不要租？預算 NT$800-1200/年，誰執行登記？要不要順便申請 @tiya.org.tw 信箱？</a:t>
             </a:r>
             <a:endParaRPr lang="en-US" sz="1300" dirty="0"/>
           </a:p>
@@ -13587,7 +13587,7 @@
                 <a:ea typeface="Noto Sans TC" pitchFamily="34" charset="-122"/>
                 <a:cs typeface="Noto Sans TC" pitchFamily="34" charset="-120"/>
               </a:rPr>
-              <a:t>執行：理事長持證件去註冊，技術窗口（我）接後續 DNS／網站設定</a:t>
+              <a:t>用協會 Gmail（2024tiya@gmail.com）註冊，跟現有信箱管理機制一樣</a:t>
             </a:r>
             <a:endParaRPr lang="en-US" sz="1600" dirty="0"/>
           </a:p>
@@ -13736,7 +13736,7 @@
                 <a:ea typeface="Noto Sans TC" pitchFamily="34" charset="-122"/>
                 <a:cs typeface="Noto Sans TC" pitchFamily="34" charset="-120"/>
               </a:rPr>
-              <a:t>誰持有？協會官方信箱密碼誰管？（這是關鍵 — 個人持有風險很大）</a:t>
+              <a:t>誰來執行登記？（需要協會證件影本）</a:t>
             </a:r>
             <a:endParaRPr lang="en-US" sz="1600" dirty="0"/>
           </a:p>
@@ -13757,7 +13757,7 @@
                 <a:ea typeface="Noto Sans TC" pitchFamily="34" charset="-122"/>
                 <a:cs typeface="Noto Sans TC" pitchFamily="34" charset="-120"/>
               </a:rPr>
-              <a:t>預算 NT$800-1200/年由協會公帳支出，誰刷卡？</a:t>
+              <a:t>要不要也順便申請 @tiya.org.tw 信箱？（Google for Nonprofits 免費）</a:t>
             </a:r>
             <a:endParaRPr lang="en-US" sz="1600" dirty="0"/>
           </a:p>
@@ -13796,7 +13796,7 @@
                 <a:ea typeface="Noto Sans TC" pitchFamily="34" charset="-122"/>
                 <a:cs typeface="Noto Sans TC" pitchFamily="34" charset="-120"/>
               </a:rPr>
-              <a:t>📄 完整細節：報告書 1.2 節（網域種類比較、註冊商價格、申請流程、誰持有的風險）</a:t>
+              <a:t>📄 完整細節：報告書 1.2 節（網域種類比較、註冊商價格、申請流程、自己的信箱）</a:t>
             </a:r>
             <a:endParaRPr lang="en-US" sz="1300" dirty="0"/>
           </a:p>
